--- a/assets/figures-editable/c1-c2/c2-e29.pptx
+++ b/assets/figures-editable/c1-c2/c2-e29.pptx
@@ -7,7 +7,7 @@
   <p:sldIdLst>
     <p:sldId id="256" r:id="rId7"/>
   </p:sldIdLst>
-  <p:sldSz cx="11948160" cy="7924799" type="screen4x3"/>
+  <p:sldSz cx="12191695" cy="6858000" type="screen4x3"/>
   <p:notesSz cx="6858000" cy="9144000"/>
   <p:defaultTextStyle>
     <a:defPPr>
@@ -3098,14 +3098,14 @@
       <p:grpSpPr/>
       <p:sp>
         <p:nvSpPr>
-          <p:cNvPr id="2" name="text1" descr="sci-ppt:C2-E29-001"/>
+          <p:cNvPr id="2" name="C2-E29 text 0" descr="sci-ppt:o000"/>
           <p:cNvSpPr txBox="1"/>
           <p:nvPr/>
         </p:nvSpPr>
         <p:spPr>
           <a:xfrm>
-            <a:off x="316992" y="268224"/>
-            <a:ext cx="11277600" cy="359054"/>
+            <a:off x="274320" y="118872"/>
+            <a:ext cx="11612880" cy="340105"/>
           </a:xfrm>
           <a:prstGeom prst="rect">
             <a:avLst/>
@@ -3114,7 +3114,7 @@
           <a:effectLst/>
         </p:spPr>
         <p:txBody>
-          <a:bodyPr wrap="none" lIns="27432" rIns="27432" tIns="18288" bIns="18288" anchor="ctr">
+          <a:bodyPr wrap="none" lIns="18288" rIns="18288" tIns="18288" bIns="18288" anchor="t">
             <a:spAutoFit/>
           </a:bodyPr>
           <a:lstStyle/>
@@ -3125,34 +3125,71 @@
               </a:spcAft>
             </a:pPr>
             <a:r>
-              <a:rPr sz="1823" b="0" i="0">
+              <a:rPr sz="1900" b="1" i="0">
                 <a:solidFill>
                   <a:srgbClr val="8EDBD4"/>
                 </a:solidFill>
                 <a:latin typeface="Arial"/>
               </a:rPr>
-              <a:t>C2-E29 | Physical-variable diagram</a:t>
-            </a:r>
-          </a:p>
-        </p:txBody>
-      </p:sp>
-      <p:sp>
-        <p:nvSpPr>
-          <p:cNvPr id="3" name="rect2" descr="sci-ppt:C2-E29-002"/>
-          <p:cNvSpPr/>
+              <a:t>C2-E29 · Refined constant-pressure enthalpy path</a:t>
+            </a:r>
+          </a:p>
+        </p:txBody>
+      </p:sp>
+      <p:sp>
+        <p:nvSpPr>
+          <p:cNvPr id="3" name="C2-E29 text 1" descr="sci-ppt:o001"/>
+          <p:cNvSpPr txBox="1"/>
           <p:nvPr/>
         </p:nvSpPr>
         <p:spPr>
           <a:xfrm>
-            <a:off x="914400" y="1828800"/>
-            <a:ext cx="3048000" cy="1219200"/>
+            <a:off x="457200" y="914400"/>
+            <a:ext cx="6858000" cy="254889"/>
           </a:xfrm>
           <a:prstGeom prst="rect">
             <a:avLst/>
           </a:prstGeom>
-          <a:solidFill>
-            <a:srgbClr val="213E4B"/>
-          </a:solidFill>
+          <a:noFill/>
+          <a:effectLst/>
+        </p:spPr>
+        <p:txBody>
+          <a:bodyPr wrap="none" lIns="18288" rIns="18288" tIns="18288" bIns="18288" anchor="t">
+            <a:spAutoFit/>
+          </a:bodyPr>
+          <a:lstStyle/>
+          <a:p>
+            <a:pPr algn="l">
+              <a:spcAft>
+                <a:spcPts val="0"/>
+              </a:spcAft>
+            </a:pPr>
+            <a:r>
+              <a:rPr sz="1350" b="1" i="0">
+                <a:solidFill>
+                  <a:srgbClr val="8EDBD4"/>
+                </a:solidFill>
+                <a:latin typeface="Arial"/>
+              </a:rPr>
+              <a:t>Specific enthalpy gained along the constant-pressure path (kJ/kg)</a:t>
+            </a:r>
+          </a:p>
+        </p:txBody>
+      </p:sp>
+      <p:cxnSp>
+        <p:nvCxnSpPr>
+          <p:cNvPr id="4" name="C2-E29 line 2" descr="sci-ppt:o002"/>
+          <p:cNvCxnSpPr/>
+          <p:nvPr/>
+        </p:nvCxnSpPr>
+        <p:spPr>
+          <a:xfrm>
+            <a:off x="914400" y="4983480"/>
+            <a:ext cx="6126480" cy="0"/>
+          </a:xfrm>
+          <a:prstGeom prst="line">
+            <a:avLst/>
+          </a:prstGeom>
           <a:ln w="19050">
             <a:solidFill>
               <a:srgbClr val="B4C7D2"/>
@@ -3160,71 +3197,21 @@
           </a:ln>
           <a:effectLst/>
         </p:spPr>
-        <p:txBody>
-          <a:bodyPr rtlCol="0" anchor="ctr"/>
-          <a:lstStyle/>
-          <a:p>
-            <a:pPr algn="ctr"/>
-          </a:p>
-        </p:txBody>
-      </p:sp>
-      <p:sp>
-        <p:nvSpPr>
-          <p:cNvPr id="4" name="text3" descr="sci-ppt:C2-E29-003"/>
-          <p:cNvSpPr txBox="1"/>
+      </p:cxnSp>
+      <p:cxnSp>
+        <p:nvCxnSpPr>
+          <p:cNvPr id="5" name="C2-E29 line 3" descr="sci-ppt:o003"/>
+          <p:cNvCxnSpPr/>
           <p:nvPr/>
-        </p:nvSpPr>
-        <p:spPr>
-          <a:xfrm>
-            <a:off x="1036320" y="1950720"/>
-            <a:ext cx="2865120" cy="340156"/>
-          </a:xfrm>
-          <a:prstGeom prst="rect">
-            <a:avLst/>
-          </a:prstGeom>
-          <a:noFill/>
-          <a:effectLst/>
-        </p:spPr>
-        <p:txBody>
-          <a:bodyPr wrap="none" lIns="27432" rIns="27432" tIns="18288" bIns="18288" anchor="ctr">
-            <a:spAutoFit/>
-          </a:bodyPr>
-          <a:lstStyle/>
-          <a:p>
-            <a:pPr algn="l">
-              <a:spcAft>
-                <a:spcPts val="0"/>
-              </a:spcAft>
-            </a:pPr>
-            <a:r>
-              <a:rPr sz="1728" b="0" i="0">
-                <a:solidFill>
-                  <a:srgbClr val="E7F0F3"/>
-                </a:solidFill>
-                <a:latin typeface="Arial"/>
-              </a:rPr>
-              <a:t>Liquid heating</a:t>
-            </a:r>
-          </a:p>
-        </p:txBody>
-      </p:sp>
-      <p:sp>
-        <p:nvSpPr>
-          <p:cNvPr id="5" name="rect4" descr="sci-ppt:C2-E29-004"/>
-          <p:cNvSpPr/>
-          <p:nvPr/>
-        </p:nvSpPr>
-        <p:spPr>
-          <a:xfrm>
-            <a:off x="4450080" y="1828800"/>
-            <a:ext cx="3048000" cy="1219200"/>
-          </a:xfrm>
-          <a:prstGeom prst="rect">
-            <a:avLst/>
-          </a:prstGeom>
-          <a:solidFill>
-            <a:srgbClr val="213E4B"/>
-          </a:solidFill>
+        </p:nvCxnSpPr>
+        <p:spPr>
+          <a:xfrm>
+            <a:off x="914400" y="1691640"/>
+            <a:ext cx="0" cy="3291840"/>
+          </a:xfrm>
+          <a:prstGeom prst="line">
+            <a:avLst/>
+          </a:prstGeom>
           <a:ln w="19050">
             <a:solidFill>
               <a:srgbClr val="B4C7D2"/>
@@ -3232,24 +3219,61 @@
           </a:ln>
           <a:effectLst/>
         </p:spPr>
-        <p:txBody>
-          <a:bodyPr rtlCol="0" anchor="ctr"/>
-          <a:lstStyle/>
-          <a:p>
-            <a:pPr algn="ctr"/>
-          </a:p>
-        </p:txBody>
-      </p:sp>
-      <p:sp>
-        <p:nvSpPr>
-          <p:cNvPr id="6" name="text5" descr="sci-ppt:C2-E29-005"/>
+      </p:cxnSp>
+      <p:cxnSp>
+        <p:nvCxnSpPr>
+          <p:cNvPr id="6" name="C2-E29 line 4" descr="sci-ppt:o004"/>
+          <p:cNvCxnSpPr/>
+          <p:nvPr/>
+        </p:nvCxnSpPr>
+        <p:spPr>
+          <a:xfrm>
+            <a:off x="914400" y="4983480"/>
+            <a:ext cx="0" cy="64008"/>
+          </a:xfrm>
+          <a:prstGeom prst="line">
+            <a:avLst/>
+          </a:prstGeom>
+          <a:ln w="12700">
+            <a:solidFill>
+              <a:srgbClr val="B4C7D2"/>
+            </a:solidFill>
+          </a:ln>
+          <a:effectLst/>
+        </p:spPr>
+      </p:cxnSp>
+      <p:cxnSp>
+        <p:nvCxnSpPr>
+          <p:cNvPr id="7" name="C2-E29 line 5" descr="sci-ppt:o005"/>
+          <p:cNvCxnSpPr/>
+          <p:nvPr/>
+        </p:nvCxnSpPr>
+        <p:spPr>
+          <a:xfrm>
+            <a:off x="914400" y="1691640"/>
+            <a:ext cx="0" cy="3291840"/>
+          </a:xfrm>
+          <a:prstGeom prst="line">
+            <a:avLst/>
+          </a:prstGeom>
+          <a:ln w="7620">
+            <a:solidFill>
+              <a:srgbClr val="2E4756"/>
+            </a:solidFill>
+          </a:ln>
+          <a:effectLst/>
+        </p:spPr>
+      </p:cxnSp>
+      <p:sp>
+        <p:nvSpPr>
+          <p:cNvPr id="8" name="C2-E29 text 6" descr="sci-ppt:o006"/>
           <p:cNvSpPr txBox="1"/>
           <p:nvPr/>
         </p:nvSpPr>
         <p:spPr>
           <a:xfrm>
-            <a:off x="4572000" y="1950720"/>
-            <a:ext cx="2865120" cy="340156"/>
+            <a:off x="457200" y="5065776"/>
+            <a:ext cx="914400" cy="208407"/>
           </a:xfrm>
           <a:prstGeom prst="rect">
             <a:avLst/>
@@ -3258,7 +3282,781 @@
           <a:effectLst/>
         </p:spPr>
         <p:txBody>
-          <a:bodyPr wrap="none" lIns="27432" rIns="27432" tIns="18288" bIns="18288" anchor="ctr">
+          <a:bodyPr wrap="none" lIns="18288" rIns="18288" tIns="18288" bIns="18288" anchor="t">
+            <a:spAutoFit/>
+          </a:bodyPr>
+          <a:lstStyle/>
+          <a:p>
+            <a:pPr algn="ctr">
+              <a:spcAft>
+                <a:spcPts val="0"/>
+              </a:spcAft>
+            </a:pPr>
+            <a:r>
+              <a:rPr sz="1050" b="0" i="0">
+                <a:solidFill>
+                  <a:srgbClr val="B4C7D2"/>
+                </a:solidFill>
+                <a:latin typeface="Arial"/>
+              </a:rPr>
+              <a:t>290</a:t>
+            </a:r>
+          </a:p>
+        </p:txBody>
+      </p:sp>
+      <p:cxnSp>
+        <p:nvCxnSpPr>
+          <p:cNvPr id="9" name="C2-E29 line 7" descr="sci-ppt:o007"/>
+          <p:cNvCxnSpPr/>
+          <p:nvPr/>
+        </p:nvCxnSpPr>
+        <p:spPr>
+          <a:xfrm>
+            <a:off x="2616200" y="4983480"/>
+            <a:ext cx="0" cy="64008"/>
+          </a:xfrm>
+          <a:prstGeom prst="line">
+            <a:avLst/>
+          </a:prstGeom>
+          <a:ln w="12700">
+            <a:solidFill>
+              <a:srgbClr val="B4C7D2"/>
+            </a:solidFill>
+          </a:ln>
+          <a:effectLst/>
+        </p:spPr>
+      </p:cxnSp>
+      <p:cxnSp>
+        <p:nvCxnSpPr>
+          <p:cNvPr id="10" name="C2-E29 line 8" descr="sci-ppt:o008"/>
+          <p:cNvCxnSpPr/>
+          <p:nvPr/>
+        </p:nvCxnSpPr>
+        <p:spPr>
+          <a:xfrm>
+            <a:off x="2616200" y="1691640"/>
+            <a:ext cx="0" cy="3291840"/>
+          </a:xfrm>
+          <a:prstGeom prst="line">
+            <a:avLst/>
+          </a:prstGeom>
+          <a:ln w="7620">
+            <a:solidFill>
+              <a:srgbClr val="2E4756"/>
+            </a:solidFill>
+          </a:ln>
+          <a:effectLst/>
+        </p:spPr>
+      </p:cxnSp>
+      <p:sp>
+        <p:nvSpPr>
+          <p:cNvPr id="11" name="C2-E29 text 9" descr="sci-ppt:o009"/>
+          <p:cNvSpPr txBox="1"/>
+          <p:nvPr/>
+        </p:nvSpPr>
+        <p:spPr>
+          <a:xfrm>
+            <a:off x="2159000" y="5065776"/>
+            <a:ext cx="914400" cy="208407"/>
+          </a:xfrm>
+          <a:prstGeom prst="rect">
+            <a:avLst/>
+          </a:prstGeom>
+          <a:noFill/>
+          <a:effectLst/>
+        </p:spPr>
+        <p:txBody>
+          <a:bodyPr wrap="none" lIns="18288" rIns="18288" tIns="18288" bIns="18288" anchor="t">
+            <a:spAutoFit/>
+          </a:bodyPr>
+          <a:lstStyle/>
+          <a:p>
+            <a:pPr algn="ctr">
+              <a:spcAft>
+                <a:spcPts val="0"/>
+              </a:spcAft>
+            </a:pPr>
+            <a:r>
+              <a:rPr sz="1050" b="0" i="0">
+                <a:solidFill>
+                  <a:srgbClr val="B4C7D2"/>
+                </a:solidFill>
+                <a:latin typeface="Arial"/>
+              </a:rPr>
+              <a:t>300</a:t>
+            </a:r>
+          </a:p>
+        </p:txBody>
+      </p:sp>
+      <p:cxnSp>
+        <p:nvCxnSpPr>
+          <p:cNvPr id="12" name="C2-E29 line 10" descr="sci-ppt:o010"/>
+          <p:cNvCxnSpPr/>
+          <p:nvPr/>
+        </p:nvCxnSpPr>
+        <p:spPr>
+          <a:xfrm>
+            <a:off x="4318000" y="4983480"/>
+            <a:ext cx="0" cy="64008"/>
+          </a:xfrm>
+          <a:prstGeom prst="line">
+            <a:avLst/>
+          </a:prstGeom>
+          <a:ln w="12700">
+            <a:solidFill>
+              <a:srgbClr val="B4C7D2"/>
+            </a:solidFill>
+          </a:ln>
+          <a:effectLst/>
+        </p:spPr>
+      </p:cxnSp>
+      <p:cxnSp>
+        <p:nvCxnSpPr>
+          <p:cNvPr id="13" name="C2-E29 line 11" descr="sci-ppt:o011"/>
+          <p:cNvCxnSpPr/>
+          <p:nvPr/>
+        </p:nvCxnSpPr>
+        <p:spPr>
+          <a:xfrm>
+            <a:off x="4318000" y="1691640"/>
+            <a:ext cx="0" cy="3291840"/>
+          </a:xfrm>
+          <a:prstGeom prst="line">
+            <a:avLst/>
+          </a:prstGeom>
+          <a:ln w="7620">
+            <a:solidFill>
+              <a:srgbClr val="2E4756"/>
+            </a:solidFill>
+          </a:ln>
+          <a:effectLst/>
+        </p:spPr>
+      </p:cxnSp>
+      <p:sp>
+        <p:nvSpPr>
+          <p:cNvPr id="14" name="C2-E29 text 12" descr="sci-ppt:o012"/>
+          <p:cNvSpPr txBox="1"/>
+          <p:nvPr/>
+        </p:nvSpPr>
+        <p:spPr>
+          <a:xfrm>
+            <a:off x="3860800" y="5065776"/>
+            <a:ext cx="914400" cy="208407"/>
+          </a:xfrm>
+          <a:prstGeom prst="rect">
+            <a:avLst/>
+          </a:prstGeom>
+          <a:noFill/>
+          <a:effectLst/>
+        </p:spPr>
+        <p:txBody>
+          <a:bodyPr wrap="none" lIns="18288" rIns="18288" tIns="18288" bIns="18288" anchor="t">
+            <a:spAutoFit/>
+          </a:bodyPr>
+          <a:lstStyle/>
+          <a:p>
+            <a:pPr algn="ctr">
+              <a:spcAft>
+                <a:spcPts val="0"/>
+              </a:spcAft>
+            </a:pPr>
+            <a:r>
+              <a:rPr sz="1050" b="0" i="0">
+                <a:solidFill>
+                  <a:srgbClr val="B4C7D2"/>
+                </a:solidFill>
+                <a:latin typeface="Arial"/>
+              </a:rPr>
+              <a:t>310</a:t>
+            </a:r>
+          </a:p>
+        </p:txBody>
+      </p:sp>
+      <p:cxnSp>
+        <p:nvCxnSpPr>
+          <p:cNvPr id="15" name="C2-E29 line 13" descr="sci-ppt:o013"/>
+          <p:cNvCxnSpPr/>
+          <p:nvPr/>
+        </p:nvCxnSpPr>
+        <p:spPr>
+          <a:xfrm>
+            <a:off x="6019800" y="4983480"/>
+            <a:ext cx="0" cy="64008"/>
+          </a:xfrm>
+          <a:prstGeom prst="line">
+            <a:avLst/>
+          </a:prstGeom>
+          <a:ln w="12700">
+            <a:solidFill>
+              <a:srgbClr val="B4C7D2"/>
+            </a:solidFill>
+          </a:ln>
+          <a:effectLst/>
+        </p:spPr>
+      </p:cxnSp>
+      <p:cxnSp>
+        <p:nvCxnSpPr>
+          <p:cNvPr id="16" name="C2-E29 line 14" descr="sci-ppt:o014"/>
+          <p:cNvCxnSpPr/>
+          <p:nvPr/>
+        </p:nvCxnSpPr>
+        <p:spPr>
+          <a:xfrm>
+            <a:off x="6019800" y="1691640"/>
+            <a:ext cx="0" cy="3291840"/>
+          </a:xfrm>
+          <a:prstGeom prst="line">
+            <a:avLst/>
+          </a:prstGeom>
+          <a:ln w="7620">
+            <a:solidFill>
+              <a:srgbClr val="2E4756"/>
+            </a:solidFill>
+          </a:ln>
+          <a:effectLst/>
+        </p:spPr>
+      </p:cxnSp>
+      <p:sp>
+        <p:nvSpPr>
+          <p:cNvPr id="17" name="C2-E29 text 15" descr="sci-ppt:o015"/>
+          <p:cNvSpPr txBox="1"/>
+          <p:nvPr/>
+        </p:nvSpPr>
+        <p:spPr>
+          <a:xfrm>
+            <a:off x="5562600" y="5065776"/>
+            <a:ext cx="914400" cy="208407"/>
+          </a:xfrm>
+          <a:prstGeom prst="rect">
+            <a:avLst/>
+          </a:prstGeom>
+          <a:noFill/>
+          <a:effectLst/>
+        </p:spPr>
+        <p:txBody>
+          <a:bodyPr wrap="none" lIns="18288" rIns="18288" tIns="18288" bIns="18288" anchor="t">
+            <a:spAutoFit/>
+          </a:bodyPr>
+          <a:lstStyle/>
+          <a:p>
+            <a:pPr algn="ctr">
+              <a:spcAft>
+                <a:spcPts val="0"/>
+              </a:spcAft>
+            </a:pPr>
+            <a:r>
+              <a:rPr sz="1050" b="0" i="0">
+                <a:solidFill>
+                  <a:srgbClr val="B4C7D2"/>
+                </a:solidFill>
+                <a:latin typeface="Arial"/>
+              </a:rPr>
+              <a:t>320</a:t>
+            </a:r>
+          </a:p>
+        </p:txBody>
+      </p:sp>
+      <p:cxnSp>
+        <p:nvCxnSpPr>
+          <p:cNvPr id="18" name="C2-E29 line 16" descr="sci-ppt:o016"/>
+          <p:cNvCxnSpPr/>
+          <p:nvPr/>
+        </p:nvCxnSpPr>
+        <p:spPr>
+          <a:xfrm>
+            <a:off x="850392" y="4983480"/>
+            <a:ext cx="64008" cy="0"/>
+          </a:xfrm>
+          <a:prstGeom prst="line">
+            <a:avLst/>
+          </a:prstGeom>
+          <a:ln w="12700">
+            <a:solidFill>
+              <a:srgbClr val="B4C7D2"/>
+            </a:solidFill>
+          </a:ln>
+          <a:effectLst/>
+        </p:spPr>
+      </p:cxnSp>
+      <p:cxnSp>
+        <p:nvCxnSpPr>
+          <p:cNvPr id="19" name="C2-E29 line 17" descr="sci-ppt:o017"/>
+          <p:cNvCxnSpPr/>
+          <p:nvPr/>
+        </p:nvCxnSpPr>
+        <p:spPr>
+          <a:xfrm>
+            <a:off x="850392" y="4325112"/>
+            <a:ext cx="64008" cy="0"/>
+          </a:xfrm>
+          <a:prstGeom prst="line">
+            <a:avLst/>
+          </a:prstGeom>
+          <a:ln w="12700">
+            <a:solidFill>
+              <a:srgbClr val="B4C7D2"/>
+            </a:solidFill>
+          </a:ln>
+          <a:effectLst/>
+        </p:spPr>
+      </p:cxnSp>
+      <p:cxnSp>
+        <p:nvCxnSpPr>
+          <p:cNvPr id="20" name="C2-E29 line 18" descr="sci-ppt:o018"/>
+          <p:cNvCxnSpPr/>
+          <p:nvPr/>
+        </p:nvCxnSpPr>
+        <p:spPr>
+          <a:xfrm>
+            <a:off x="914400" y="4325112"/>
+            <a:ext cx="6126480" cy="0"/>
+          </a:xfrm>
+          <a:prstGeom prst="line">
+            <a:avLst/>
+          </a:prstGeom>
+          <a:ln w="7620">
+            <a:solidFill>
+              <a:srgbClr val="2E4756"/>
+            </a:solidFill>
+          </a:ln>
+          <a:effectLst/>
+        </p:spPr>
+      </p:cxnSp>
+      <p:sp>
+        <p:nvSpPr>
+          <p:cNvPr id="21" name="C2-E29 text 19" descr="sci-ppt:o019"/>
+          <p:cNvSpPr txBox="1"/>
+          <p:nvPr/>
+        </p:nvSpPr>
+        <p:spPr>
+          <a:xfrm>
+            <a:off x="45720" y="4242816"/>
+            <a:ext cx="777240" cy="208407"/>
+          </a:xfrm>
+          <a:prstGeom prst="rect">
+            <a:avLst/>
+          </a:prstGeom>
+          <a:noFill/>
+          <a:effectLst/>
+        </p:spPr>
+        <p:txBody>
+          <a:bodyPr wrap="none" lIns="18288" rIns="18288" tIns="18288" bIns="18288" anchor="t">
+            <a:spAutoFit/>
+          </a:bodyPr>
+          <a:lstStyle/>
+          <a:p>
+            <a:pPr algn="r">
+              <a:spcAft>
+                <a:spcPts val="0"/>
+              </a:spcAft>
+            </a:pPr>
+            <a:r>
+              <a:rPr sz="1050" b="0" i="0">
+                <a:solidFill>
+                  <a:srgbClr val="B4C7D2"/>
+                </a:solidFill>
+                <a:latin typeface="Arial"/>
+              </a:rPr>
+              <a:t>25</a:t>
+            </a:r>
+          </a:p>
+        </p:txBody>
+      </p:sp>
+      <p:cxnSp>
+        <p:nvCxnSpPr>
+          <p:cNvPr id="22" name="C2-E29 line 20" descr="sci-ppt:o020"/>
+          <p:cNvCxnSpPr/>
+          <p:nvPr/>
+        </p:nvCxnSpPr>
+        <p:spPr>
+          <a:xfrm>
+            <a:off x="850392" y="3666744"/>
+            <a:ext cx="64008" cy="0"/>
+          </a:xfrm>
+          <a:prstGeom prst="line">
+            <a:avLst/>
+          </a:prstGeom>
+          <a:ln w="12700">
+            <a:solidFill>
+              <a:srgbClr val="B4C7D2"/>
+            </a:solidFill>
+          </a:ln>
+          <a:effectLst/>
+        </p:spPr>
+      </p:cxnSp>
+      <p:cxnSp>
+        <p:nvCxnSpPr>
+          <p:cNvPr id="23" name="C2-E29 line 21" descr="sci-ppt:o021"/>
+          <p:cNvCxnSpPr/>
+          <p:nvPr/>
+        </p:nvCxnSpPr>
+        <p:spPr>
+          <a:xfrm>
+            <a:off x="914400" y="3666744"/>
+            <a:ext cx="6126480" cy="0"/>
+          </a:xfrm>
+          <a:prstGeom prst="line">
+            <a:avLst/>
+          </a:prstGeom>
+          <a:ln w="7620">
+            <a:solidFill>
+              <a:srgbClr val="2E4756"/>
+            </a:solidFill>
+          </a:ln>
+          <a:effectLst/>
+        </p:spPr>
+      </p:cxnSp>
+      <p:sp>
+        <p:nvSpPr>
+          <p:cNvPr id="24" name="C2-E29 text 22" descr="sci-ppt:o022"/>
+          <p:cNvSpPr txBox="1"/>
+          <p:nvPr/>
+        </p:nvSpPr>
+        <p:spPr>
+          <a:xfrm>
+            <a:off x="45720" y="3584448"/>
+            <a:ext cx="777240" cy="208407"/>
+          </a:xfrm>
+          <a:prstGeom prst="rect">
+            <a:avLst/>
+          </a:prstGeom>
+          <a:noFill/>
+          <a:effectLst/>
+        </p:spPr>
+        <p:txBody>
+          <a:bodyPr wrap="none" lIns="18288" rIns="18288" tIns="18288" bIns="18288" anchor="t">
+            <a:spAutoFit/>
+          </a:bodyPr>
+          <a:lstStyle/>
+          <a:p>
+            <a:pPr algn="r">
+              <a:spcAft>
+                <a:spcPts val="0"/>
+              </a:spcAft>
+            </a:pPr>
+            <a:r>
+              <a:rPr sz="1050" b="0" i="0">
+                <a:solidFill>
+                  <a:srgbClr val="B4C7D2"/>
+                </a:solidFill>
+                <a:latin typeface="Arial"/>
+              </a:rPr>
+              <a:t>50</a:t>
+            </a:r>
+          </a:p>
+        </p:txBody>
+      </p:sp>
+      <p:cxnSp>
+        <p:nvCxnSpPr>
+          <p:cNvPr id="25" name="C2-E29 line 23" descr="sci-ppt:o023"/>
+          <p:cNvCxnSpPr/>
+          <p:nvPr/>
+        </p:nvCxnSpPr>
+        <p:spPr>
+          <a:xfrm>
+            <a:off x="850392" y="3008376"/>
+            <a:ext cx="64008" cy="0"/>
+          </a:xfrm>
+          <a:prstGeom prst="line">
+            <a:avLst/>
+          </a:prstGeom>
+          <a:ln w="12700">
+            <a:solidFill>
+              <a:srgbClr val="B4C7D2"/>
+            </a:solidFill>
+          </a:ln>
+          <a:effectLst/>
+        </p:spPr>
+      </p:cxnSp>
+      <p:cxnSp>
+        <p:nvCxnSpPr>
+          <p:cNvPr id="26" name="C2-E29 line 24" descr="sci-ppt:o024"/>
+          <p:cNvCxnSpPr/>
+          <p:nvPr/>
+        </p:nvCxnSpPr>
+        <p:spPr>
+          <a:xfrm>
+            <a:off x="914400" y="3008376"/>
+            <a:ext cx="6126480" cy="0"/>
+          </a:xfrm>
+          <a:prstGeom prst="line">
+            <a:avLst/>
+          </a:prstGeom>
+          <a:ln w="7620">
+            <a:solidFill>
+              <a:srgbClr val="2E4756"/>
+            </a:solidFill>
+          </a:ln>
+          <a:effectLst/>
+        </p:spPr>
+      </p:cxnSp>
+      <p:sp>
+        <p:nvSpPr>
+          <p:cNvPr id="27" name="C2-E29 text 25" descr="sci-ppt:o025"/>
+          <p:cNvSpPr txBox="1"/>
+          <p:nvPr/>
+        </p:nvSpPr>
+        <p:spPr>
+          <a:xfrm>
+            <a:off x="45720" y="2926080"/>
+            <a:ext cx="777240" cy="208407"/>
+          </a:xfrm>
+          <a:prstGeom prst="rect">
+            <a:avLst/>
+          </a:prstGeom>
+          <a:noFill/>
+          <a:effectLst/>
+        </p:spPr>
+        <p:txBody>
+          <a:bodyPr wrap="none" lIns="18288" rIns="18288" tIns="18288" bIns="18288" anchor="t">
+            <a:spAutoFit/>
+          </a:bodyPr>
+          <a:lstStyle/>
+          <a:p>
+            <a:pPr algn="r">
+              <a:spcAft>
+                <a:spcPts val="0"/>
+              </a:spcAft>
+            </a:pPr>
+            <a:r>
+              <a:rPr sz="1050" b="0" i="0">
+                <a:solidFill>
+                  <a:srgbClr val="B4C7D2"/>
+                </a:solidFill>
+                <a:latin typeface="Arial"/>
+              </a:rPr>
+              <a:t>75</a:t>
+            </a:r>
+          </a:p>
+        </p:txBody>
+      </p:sp>
+      <p:cxnSp>
+        <p:nvCxnSpPr>
+          <p:cNvPr id="28" name="C2-E29 line 26" descr="sci-ppt:o026"/>
+          <p:cNvCxnSpPr/>
+          <p:nvPr/>
+        </p:nvCxnSpPr>
+        <p:spPr>
+          <a:xfrm>
+            <a:off x="850392" y="2350008"/>
+            <a:ext cx="64008" cy="0"/>
+          </a:xfrm>
+          <a:prstGeom prst="line">
+            <a:avLst/>
+          </a:prstGeom>
+          <a:ln w="12700">
+            <a:solidFill>
+              <a:srgbClr val="B4C7D2"/>
+            </a:solidFill>
+          </a:ln>
+          <a:effectLst/>
+        </p:spPr>
+      </p:cxnSp>
+      <p:cxnSp>
+        <p:nvCxnSpPr>
+          <p:cNvPr id="29" name="C2-E29 line 27" descr="sci-ppt:o027"/>
+          <p:cNvCxnSpPr/>
+          <p:nvPr/>
+        </p:nvCxnSpPr>
+        <p:spPr>
+          <a:xfrm>
+            <a:off x="914400" y="2350008"/>
+            <a:ext cx="6126480" cy="0"/>
+          </a:xfrm>
+          <a:prstGeom prst="line">
+            <a:avLst/>
+          </a:prstGeom>
+          <a:ln w="7620">
+            <a:solidFill>
+              <a:srgbClr val="2E4756"/>
+            </a:solidFill>
+          </a:ln>
+          <a:effectLst/>
+        </p:spPr>
+      </p:cxnSp>
+      <p:sp>
+        <p:nvSpPr>
+          <p:cNvPr id="30" name="C2-E29 text 28" descr="sci-ppt:o028"/>
+          <p:cNvSpPr txBox="1"/>
+          <p:nvPr/>
+        </p:nvSpPr>
+        <p:spPr>
+          <a:xfrm>
+            <a:off x="45720" y="2267712"/>
+            <a:ext cx="777240" cy="208407"/>
+          </a:xfrm>
+          <a:prstGeom prst="rect">
+            <a:avLst/>
+          </a:prstGeom>
+          <a:noFill/>
+          <a:effectLst/>
+        </p:spPr>
+        <p:txBody>
+          <a:bodyPr wrap="none" lIns="18288" rIns="18288" tIns="18288" bIns="18288" anchor="t">
+            <a:spAutoFit/>
+          </a:bodyPr>
+          <a:lstStyle/>
+          <a:p>
+            <a:pPr algn="r">
+              <a:spcAft>
+                <a:spcPts val="0"/>
+              </a:spcAft>
+            </a:pPr>
+            <a:r>
+              <a:rPr sz="1050" b="0" i="0">
+                <a:solidFill>
+                  <a:srgbClr val="B4C7D2"/>
+                </a:solidFill>
+                <a:latin typeface="Arial"/>
+              </a:rPr>
+              <a:t>100</a:t>
+            </a:r>
+          </a:p>
+        </p:txBody>
+      </p:sp>
+      <p:cxnSp>
+        <p:nvCxnSpPr>
+          <p:cNvPr id="31" name="C2-E29 line 29" descr="sci-ppt:o029"/>
+          <p:cNvCxnSpPr/>
+          <p:nvPr/>
+        </p:nvCxnSpPr>
+        <p:spPr>
+          <a:xfrm>
+            <a:off x="850392" y="1691640"/>
+            <a:ext cx="64008" cy="0"/>
+          </a:xfrm>
+          <a:prstGeom prst="line">
+            <a:avLst/>
+          </a:prstGeom>
+          <a:ln w="12700">
+            <a:solidFill>
+              <a:srgbClr val="B4C7D2"/>
+            </a:solidFill>
+          </a:ln>
+          <a:effectLst/>
+        </p:spPr>
+      </p:cxnSp>
+      <p:cxnSp>
+        <p:nvCxnSpPr>
+          <p:cNvPr id="32" name="C2-E29 line 30" descr="sci-ppt:o030"/>
+          <p:cNvCxnSpPr/>
+          <p:nvPr/>
+        </p:nvCxnSpPr>
+        <p:spPr>
+          <a:xfrm>
+            <a:off x="914400" y="1691640"/>
+            <a:ext cx="6126480" cy="0"/>
+          </a:xfrm>
+          <a:prstGeom prst="line">
+            <a:avLst/>
+          </a:prstGeom>
+          <a:ln w="7620">
+            <a:solidFill>
+              <a:srgbClr val="2E4756"/>
+            </a:solidFill>
+          </a:ln>
+          <a:effectLst/>
+        </p:spPr>
+      </p:cxnSp>
+      <p:sp>
+        <p:nvSpPr>
+          <p:cNvPr id="33" name="C2-E29 text 31" descr="sci-ppt:o031"/>
+          <p:cNvSpPr txBox="1"/>
+          <p:nvPr/>
+        </p:nvSpPr>
+        <p:spPr>
+          <a:xfrm>
+            <a:off x="45720" y="1609344"/>
+            <a:ext cx="777240" cy="208407"/>
+          </a:xfrm>
+          <a:prstGeom prst="rect">
+            <a:avLst/>
+          </a:prstGeom>
+          <a:noFill/>
+          <a:effectLst/>
+        </p:spPr>
+        <p:txBody>
+          <a:bodyPr wrap="none" lIns="18288" rIns="18288" tIns="18288" bIns="18288" anchor="t">
+            <a:spAutoFit/>
+          </a:bodyPr>
+          <a:lstStyle/>
+          <a:p>
+            <a:pPr algn="r">
+              <a:spcAft>
+                <a:spcPts val="0"/>
+              </a:spcAft>
+            </a:pPr>
+            <a:r>
+              <a:rPr sz="1050" b="0" i="0">
+                <a:solidFill>
+                  <a:srgbClr val="B4C7D2"/>
+                </a:solidFill>
+                <a:latin typeface="Arial"/>
+              </a:rPr>
+              <a:t>125</a:t>
+            </a:r>
+          </a:p>
+        </p:txBody>
+      </p:sp>
+      <p:sp>
+        <p:nvSpPr>
+          <p:cNvPr id="34" name="C2-E29 text 32" descr="sci-ppt:o032"/>
+          <p:cNvSpPr txBox="1"/>
+          <p:nvPr/>
+        </p:nvSpPr>
+        <p:spPr>
+          <a:xfrm>
+            <a:off x="914400" y="5266944"/>
+            <a:ext cx="6126480" cy="231648"/>
+          </a:xfrm>
+          <a:prstGeom prst="rect">
+            <a:avLst/>
+          </a:prstGeom>
+          <a:noFill/>
+          <a:effectLst/>
+        </p:spPr>
+        <p:txBody>
+          <a:bodyPr wrap="none" lIns="18288" rIns="18288" tIns="18288" bIns="18288" anchor="t">
+            <a:spAutoFit/>
+          </a:bodyPr>
+          <a:lstStyle/>
+          <a:p>
+            <a:pPr algn="ctr">
+              <a:spcAft>
+                <a:spcPts val="0"/>
+              </a:spcAft>
+            </a:pPr>
+            <a:r>
+              <a:rPr sz="1200" b="0" i="0">
+                <a:solidFill>
+                  <a:srgbClr val="E7F0F3"/>
+                </a:solidFill>
+                <a:latin typeface="Arial"/>
+              </a:rPr>
+              <a:t>temperature T  (K)</a:t>
+            </a:r>
+          </a:p>
+        </p:txBody>
+      </p:sp>
+      <p:sp>
+        <p:nvSpPr>
+          <p:cNvPr id="35" name="C2-E29 text 33" descr="sci-ppt:o033"/>
+          <p:cNvSpPr txBox="1"/>
+          <p:nvPr/>
+        </p:nvSpPr>
+        <p:spPr>
+          <a:xfrm>
+            <a:off x="365760" y="1344168"/>
+            <a:ext cx="6126480" cy="231648"/>
+          </a:xfrm>
+          <a:prstGeom prst="rect">
+            <a:avLst/>
+          </a:prstGeom>
+          <a:noFill/>
+          <a:effectLst/>
+        </p:spPr>
+        <p:txBody>
+          <a:bodyPr wrap="none" lIns="18288" rIns="18288" tIns="18288" bIns="18288" anchor="t">
             <a:spAutoFit/>
           </a:bodyPr>
           <a:lstStyle/>
@@ -3269,37 +4067,103 @@
               </a:spcAft>
             </a:pPr>
             <a:r>
-              <a:rPr sz="1728" b="0" i="0">
+              <a:rPr sz="1200" b="0" i="0">
                 <a:solidFill>
                   <a:srgbClr val="E7F0F3"/>
                 </a:solidFill>
                 <a:latin typeface="Arial"/>
               </a:rPr>
-              <a:t>Latent conversion</a:t>
-            </a:r>
-          </a:p>
-        </p:txBody>
-      </p:sp>
-      <p:sp>
-        <p:nvSpPr>
-          <p:cNvPr id="7" name="rect6" descr="sci-ppt:C2-E29-006"/>
+              <a:t>H − H₀  (kJ/kg)</a:t>
+            </a:r>
+          </a:p>
+        </p:txBody>
+      </p:sp>
+      <p:sp>
+        <p:nvSpPr>
+          <p:cNvPr id="36" name="C2-E29 polygon 34" descr="sci-ppt:o034"/>
           <p:cNvSpPr/>
           <p:nvPr/>
         </p:nvSpPr>
         <p:spPr>
           <a:xfrm>
-            <a:off x="7985759" y="1828800"/>
-            <a:ext cx="3048000" cy="1219200"/>
-          </a:xfrm>
-          <a:prstGeom prst="rect">
-            <a:avLst/>
-          </a:prstGeom>
-          <a:solidFill>
-            <a:srgbClr val="213E4B"/>
-          </a:solidFill>
-          <a:ln w="19050">
+            <a:off x="1450466" y="4829272"/>
+            <a:ext cx="1523731" cy="154208"/>
+          </a:xfrm>
+          <a:custGeom>
+            <a:avLst/>
+            <a:gdLst/>
+            <a:ahLst/>
+            <a:cxnLst/>
+            <a:rect l="l" t="t" r="r" b="b"/>
+            <a:pathLst>
+              <a:path w="1523731" h="154208">
+                <a:moveTo>
+                  <a:pt x="0" y="154208"/>
+                </a:moveTo>
+                <a:lnTo>
+                  <a:pt x="80197" y="146091"/>
+                </a:lnTo>
+                <a:lnTo>
+                  <a:pt x="160393" y="137975"/>
+                </a:lnTo>
+                <a:lnTo>
+                  <a:pt x="240590" y="129859"/>
+                </a:lnTo>
+                <a:lnTo>
+                  <a:pt x="320786" y="121743"/>
+                </a:lnTo>
+                <a:lnTo>
+                  <a:pt x="400982" y="113627"/>
+                </a:lnTo>
+                <a:lnTo>
+                  <a:pt x="481179" y="105510"/>
+                </a:lnTo>
+                <a:lnTo>
+                  <a:pt x="561375" y="97394"/>
+                </a:lnTo>
+                <a:lnTo>
+                  <a:pt x="641571" y="89278"/>
+                </a:lnTo>
+                <a:lnTo>
+                  <a:pt x="721768" y="81162"/>
+                </a:lnTo>
+                <a:lnTo>
+                  <a:pt x="801964" y="73046"/>
+                </a:lnTo>
+                <a:lnTo>
+                  <a:pt x="882160" y="64929"/>
+                </a:lnTo>
+                <a:lnTo>
+                  <a:pt x="962357" y="56813"/>
+                </a:lnTo>
+                <a:lnTo>
+                  <a:pt x="1042553" y="48697"/>
+                </a:lnTo>
+                <a:lnTo>
+                  <a:pt x="1122750" y="40581"/>
+                </a:lnTo>
+                <a:lnTo>
+                  <a:pt x="1202946" y="32465"/>
+                </a:lnTo>
+                <a:lnTo>
+                  <a:pt x="1283142" y="24348"/>
+                </a:lnTo>
+                <a:lnTo>
+                  <a:pt x="1363339" y="16232"/>
+                </a:lnTo>
+                <a:lnTo>
+                  <a:pt x="1443535" y="8116"/>
+                </a:lnTo>
+                <a:lnTo>
+                  <a:pt x="1523731" y="0"/>
+                </a:lnTo>
+              </a:path>
+            </a:pathLst>
+          </a:custGeom>
+          <a:noFill/>
+          <a:ln w="43180">
             <a:solidFill>
-              <a:srgbClr val="B4C7D2"/>
+              <a:srgbClr val="7FC8F8"/>
             </a:solidFill>
           </a:ln>
           <a:effectLst/>
@@ -3312,16 +4176,136 @@
           </a:p>
         </p:txBody>
       </p:sp>
-      <p:sp>
-        <p:nvSpPr>
-          <p:cNvPr id="8" name="text7" descr="sci-ppt:C2-E29-007"/>
+      <p:cxnSp>
+        <p:nvCxnSpPr>
+          <p:cNvPr id="37" name="C2-E29 line 35" descr="sci-ppt:o035"/>
+          <p:cNvCxnSpPr/>
+          <p:nvPr/>
+        </p:nvCxnSpPr>
+        <p:spPr>
+          <a:xfrm flipV="1">
+            <a:off x="2974197" y="2327473"/>
+            <a:ext cx="0" cy="2501799"/>
+          </a:xfrm>
+          <a:prstGeom prst="line">
+            <a:avLst/>
+          </a:prstGeom>
+          <a:ln w="43180">
+            <a:solidFill>
+              <a:srgbClr val="F28BA0"/>
+            </a:solidFill>
+          </a:ln>
+          <a:effectLst/>
+        </p:spPr>
+      </p:cxnSp>
+      <p:sp>
+        <p:nvSpPr>
+          <p:cNvPr id="38" name="C2-E29 polygon 36" descr="sci-ppt:o036"/>
+          <p:cNvSpPr/>
+          <p:nvPr/>
+        </p:nvSpPr>
+        <p:spPr>
+          <a:xfrm>
+            <a:off x="2974197" y="1828648"/>
+            <a:ext cx="3581669" cy="498825"/>
+          </a:xfrm>
+          <a:custGeom>
+            <a:avLst/>
+            <a:gdLst/>
+            <a:ahLst/>
+            <a:cxnLst/>
+            <a:rect l="l" t="t" r="r" b="b"/>
+            <a:pathLst>
+              <a:path w="3581669" h="498825">
+                <a:moveTo>
+                  <a:pt x="0" y="498825"/>
+                </a:moveTo>
+                <a:lnTo>
+                  <a:pt x="188509" y="472571"/>
+                </a:lnTo>
+                <a:lnTo>
+                  <a:pt x="377018" y="446317"/>
+                </a:lnTo>
+                <a:lnTo>
+                  <a:pt x="565527" y="420064"/>
+                </a:lnTo>
+                <a:lnTo>
+                  <a:pt x="754036" y="393810"/>
+                </a:lnTo>
+                <a:lnTo>
+                  <a:pt x="942545" y="367556"/>
+                </a:lnTo>
+                <a:lnTo>
+                  <a:pt x="1131054" y="341302"/>
+                </a:lnTo>
+                <a:lnTo>
+                  <a:pt x="1319563" y="315048"/>
+                </a:lnTo>
+                <a:lnTo>
+                  <a:pt x="1508072" y="288794"/>
+                </a:lnTo>
+                <a:lnTo>
+                  <a:pt x="1696580" y="262540"/>
+                </a:lnTo>
+                <a:lnTo>
+                  <a:pt x="1885089" y="236286"/>
+                </a:lnTo>
+                <a:lnTo>
+                  <a:pt x="2073598" y="210032"/>
+                </a:lnTo>
+                <a:lnTo>
+                  <a:pt x="2262107" y="183778"/>
+                </a:lnTo>
+                <a:lnTo>
+                  <a:pt x="2450616" y="157524"/>
+                </a:lnTo>
+                <a:lnTo>
+                  <a:pt x="2639125" y="131270"/>
+                </a:lnTo>
+                <a:lnTo>
+                  <a:pt x="2827634" y="105016"/>
+                </a:lnTo>
+                <a:lnTo>
+                  <a:pt x="3016143" y="78762"/>
+                </a:lnTo>
+                <a:lnTo>
+                  <a:pt x="3204652" y="52508"/>
+                </a:lnTo>
+                <a:lnTo>
+                  <a:pt x="3393161" y="26254"/>
+                </a:lnTo>
+                <a:lnTo>
+                  <a:pt x="3581669" y="0"/>
+                </a:lnTo>
+              </a:path>
+            </a:pathLst>
+          </a:custGeom>
+          <a:noFill/>
+          <a:ln w="43180">
+            <a:solidFill>
+              <a:srgbClr val="8EDBD4"/>
+            </a:solidFill>
+          </a:ln>
+          <a:effectLst/>
+        </p:spPr>
+        <p:txBody>
+          <a:bodyPr rtlCol="0" anchor="ctr"/>
+          <a:lstStyle/>
+          <a:p>
+            <a:pPr algn="ctr"/>
+          </a:p>
+        </p:txBody>
+      </p:sp>
+      <p:sp>
+        <p:nvSpPr>
+          <p:cNvPr id="39" name="C2-E29 text 37" descr="sci-ppt:o037"/>
           <p:cNvSpPr txBox="1"/>
           <p:nvPr/>
         </p:nvSpPr>
         <p:spPr>
           <a:xfrm>
-            <a:off x="8107680" y="1950720"/>
-            <a:ext cx="2865120" cy="340156"/>
+            <a:off x="1498092" y="4576023"/>
+            <a:ext cx="2560320" cy="402081"/>
           </a:xfrm>
           <a:prstGeom prst="rect">
             <a:avLst/>
@@ -3330,7 +4314,7 @@
           <a:effectLst/>
         </p:spPr>
         <p:txBody>
-          <a:bodyPr wrap="none" lIns="27432" rIns="27432" tIns="18288" bIns="18288" anchor="ctr">
+          <a:bodyPr wrap="none" lIns="18288" rIns="18288" tIns="18288" bIns="18288" anchor="t">
             <a:spAutoFit/>
           </a:bodyPr>
           <a:lstStyle/>
@@ -3341,27 +4325,251 @@
               </a:spcAft>
             </a:pPr>
             <a:r>
-              <a:rPr sz="1728" b="0" i="0">
+              <a:rPr sz="1150" b="0" i="0">
+                <a:solidFill>
+                  <a:srgbClr val="7FC8F8"/>
+                </a:solidFill>
+                <a:latin typeface="Arial"/>
+              </a:rPr>
+              <a:t>liquid: cₚ,l = 654 J/(kg K)</a:t>
+            </a:r>
+          </a:p>
+          <a:p>
+            <a:pPr algn="l">
+              <a:spcAft>
+                <a:spcPts val="0"/>
+              </a:spcAft>
+            </a:pPr>
+            <a:r>
+              <a:rPr sz="1150" b="0" i="0">
+                <a:solidFill>
+                  <a:srgbClr val="7FC8F8"/>
+                </a:solidFill>
+                <a:latin typeface="Arial"/>
+              </a:rPr>
+              <a:t>to Tₛₐₜ = 302.1 K</a:t>
+            </a:r>
+          </a:p>
+        </p:txBody>
+      </p:sp>
+      <p:sp>
+        <p:nvSpPr>
+          <p:cNvPr id="40" name="C2-E29 text 38" descr="sci-ppt:o038"/>
+          <p:cNvSpPr txBox="1"/>
+          <p:nvPr/>
+        </p:nvSpPr>
+        <p:spPr>
+          <a:xfrm>
+            <a:off x="3083925" y="3443630"/>
+            <a:ext cx="1645920" cy="402081"/>
+          </a:xfrm>
+          <a:prstGeom prst="rect">
+            <a:avLst/>
+          </a:prstGeom>
+          <a:noFill/>
+          <a:effectLst/>
+        </p:spPr>
+        <p:txBody>
+          <a:bodyPr wrap="none" lIns="18288" rIns="18288" tIns="18288" bIns="18288" anchor="t">
+            <a:spAutoFit/>
+          </a:bodyPr>
+          <a:lstStyle/>
+          <a:p>
+            <a:pPr algn="l">
+              <a:spcAft>
+                <a:spcPts val="0"/>
+              </a:spcAft>
+            </a:pPr>
+            <a:r>
+              <a:rPr sz="1150" b="0" i="0">
+                <a:solidFill>
+                  <a:srgbClr val="F28BA0"/>
+                </a:solidFill>
+                <a:latin typeface="Arial"/>
+              </a:rPr>
+              <a:t>latent step</a:t>
+            </a:r>
+          </a:p>
+          <a:p>
+            <a:pPr algn="l">
+              <a:spcAft>
+                <a:spcPts val="0"/>
+              </a:spcAft>
+            </a:pPr>
+            <a:r>
+              <a:rPr sz="1150" b="0" i="0">
+                <a:solidFill>
+                  <a:srgbClr val="F28BA0"/>
+                </a:solidFill>
+                <a:latin typeface="Arial"/>
+              </a:rPr>
+              <a:t>Lᵥ = 95 kJ/kg</a:t>
+            </a:r>
+          </a:p>
+        </p:txBody>
+      </p:sp>
+      <p:sp>
+        <p:nvSpPr>
+          <p:cNvPr id="41" name="C2-E29 text 39" descr="sci-ppt:o039"/>
+          <p:cNvSpPr txBox="1"/>
+          <p:nvPr/>
+        </p:nvSpPr>
+        <p:spPr>
+          <a:xfrm>
+            <a:off x="4561332" y="1784543"/>
+            <a:ext cx="3291840" cy="223900"/>
+          </a:xfrm>
+          <a:prstGeom prst="rect">
+            <a:avLst/>
+          </a:prstGeom>
+          <a:noFill/>
+          <a:effectLst/>
+        </p:spPr>
+        <p:txBody>
+          <a:bodyPr wrap="none" lIns="18288" rIns="18288" tIns="18288" bIns="18288" anchor="t">
+            <a:spAutoFit/>
+          </a:bodyPr>
+          <a:lstStyle/>
+          <a:p>
+            <a:pPr algn="l">
+              <a:spcAft>
+                <a:spcPts val="0"/>
+              </a:spcAft>
+            </a:pPr>
+            <a:r>
+              <a:rPr sz="1150" b="0" i="0">
+                <a:solidFill>
+                  <a:srgbClr val="8EDBD4"/>
+                </a:solidFill>
+                <a:latin typeface="Arial"/>
+              </a:rPr>
+              <a:t>vapor: cₚ,v (assumed 0.9 kJ/(kg K))</a:t>
+            </a:r>
+          </a:p>
+        </p:txBody>
+      </p:sp>
+      <p:sp>
+        <p:nvSpPr>
+          <p:cNvPr id="42" name="C2-E29 round_rect 40" descr="sci-ppt:o040"/>
+          <p:cNvSpPr/>
+          <p:nvPr/>
+        </p:nvSpPr>
+        <p:spPr>
+          <a:xfrm>
+            <a:off x="7315200" y="1371600"/>
+            <a:ext cx="4526280" cy="3657600"/>
+          </a:xfrm>
+          <a:prstGeom prst="roundRect">
+            <a:avLst/>
+          </a:prstGeom>
+          <a:solidFill>
+            <a:srgbClr val="213E4B"/>
+          </a:solidFill>
+          <a:ln w="20320">
+            <a:solidFill>
+              <a:srgbClr val="8EDBD4"/>
+            </a:solidFill>
+          </a:ln>
+          <a:effectLst/>
+        </p:spPr>
+        <p:txBody>
+          <a:bodyPr rtlCol="0" anchor="ctr"/>
+          <a:lstStyle/>
+          <a:p>
+            <a:pPr algn="ctr"/>
+          </a:p>
+        </p:txBody>
+      </p:sp>
+      <p:sp>
+        <p:nvSpPr>
+          <p:cNvPr id="43" name="C2-E29 text 41" descr="sci-ppt:o041"/>
+          <p:cNvSpPr txBox="1"/>
+          <p:nvPr/>
+        </p:nvSpPr>
+        <p:spPr>
+          <a:xfrm>
+            <a:off x="7424927" y="1426464"/>
+            <a:ext cx="4306824" cy="254889"/>
+          </a:xfrm>
+          <a:prstGeom prst="rect">
+            <a:avLst/>
+          </a:prstGeom>
+          <a:noFill/>
+          <a:effectLst/>
+        </p:spPr>
+        <p:txBody>
+          <a:bodyPr wrap="none" lIns="18288" rIns="18288" tIns="18288" bIns="18288" anchor="t">
+            <a:spAutoFit/>
+          </a:bodyPr>
+          <a:lstStyle/>
+          <a:p>
+            <a:pPr algn="l">
+              <a:spcAft>
+                <a:spcPts val="0"/>
+              </a:spcAft>
+            </a:pPr>
+            <a:r>
+              <a:rPr sz="1350" b="1" i="0">
+                <a:solidFill>
+                  <a:srgbClr val="8EDBD4"/>
+                </a:solidFill>
+                <a:latin typeface="Arial"/>
+              </a:rPr>
+              <a:t>Each phase uses its own cₚ</a:t>
+            </a:r>
+          </a:p>
+        </p:txBody>
+      </p:sp>
+      <p:sp>
+        <p:nvSpPr>
+          <p:cNvPr id="44" name="C2-E29 text 42" descr="sci-ppt:o042"/>
+          <p:cNvSpPr txBox="1"/>
+          <p:nvPr/>
+        </p:nvSpPr>
+        <p:spPr>
+          <a:xfrm>
+            <a:off x="7452360" y="1828800"/>
+            <a:ext cx="4297680" cy="239395"/>
+          </a:xfrm>
+          <a:prstGeom prst="rect">
+            <a:avLst/>
+          </a:prstGeom>
+          <a:noFill/>
+          <a:effectLst/>
+        </p:spPr>
+        <p:txBody>
+          <a:bodyPr wrap="none" lIns="18288" rIns="18288" tIns="18288" bIns="18288" anchor="t">
+            <a:spAutoFit/>
+          </a:bodyPr>
+          <a:lstStyle/>
+          <a:p>
+            <a:pPr algn="l">
+              <a:spcAft>
+                <a:spcPts val="0"/>
+              </a:spcAft>
+            </a:pPr>
+            <a:r>
+              <a:rPr sz="1250" b="1" i="0">
                 <a:solidFill>
                   <a:srgbClr val="E7F0F3"/>
                 </a:solidFill>
                 <a:latin typeface="Arial"/>
               </a:rPr>
-              <a:t>Vapor heating</a:t>
-            </a:r>
-          </a:p>
-        </p:txBody>
-      </p:sp>
-      <p:sp>
-        <p:nvSpPr>
-          <p:cNvPr id="9" name="text8" descr="sci-ppt:C2-E29-008"/>
+              <a:t>Qᵢₛₒ = m [ ∫cₚ,l dT + Lᵥ(Tₛₐₜ, p) + ∫cₚ,v dT ]</a:t>
+            </a:r>
+          </a:p>
+        </p:txBody>
+      </p:sp>
+      <p:sp>
+        <p:nvSpPr>
+          <p:cNvPr id="45" name="C2-E29 text 43" descr="sci-ppt:o043"/>
           <p:cNvSpPr txBox="1"/>
           <p:nvPr/>
         </p:nvSpPr>
         <p:spPr>
           <a:xfrm>
-            <a:off x="4023360" y="2255520"/>
-            <a:ext cx="487680" cy="453542"/>
+            <a:off x="7653528" y="2606040"/>
+            <a:ext cx="4096512" cy="417576"/>
           </a:xfrm>
           <a:prstGeom prst="rect">
             <a:avLst/>
@@ -3370,7 +4578,7 @@
           <a:effectLst/>
         </p:spPr>
         <p:txBody>
-          <a:bodyPr wrap="none" lIns="27432" rIns="27432" tIns="18288" bIns="18288" anchor="ctr">
+          <a:bodyPr wrap="none" lIns="18288" rIns="18288" tIns="18288" bIns="18288" anchor="t">
             <a:spAutoFit/>
           </a:bodyPr>
           <a:lstStyle/>
@@ -3381,39 +4589,15 @@
               </a:spcAft>
             </a:pPr>
             <a:r>
-              <a:rPr sz="2304" b="0" i="0">
+              <a:rPr sz="1200" b="0" i="0">
                 <a:solidFill>
                   <a:srgbClr val="E7F0F3"/>
                 </a:solidFill>
                 <a:latin typeface="Arial"/>
               </a:rPr>
-              <a:t>+</a:t>
-            </a:r>
-          </a:p>
-        </p:txBody>
-      </p:sp>
-      <p:sp>
-        <p:nvSpPr>
-          <p:cNvPr id="10" name="text9" descr="sci-ppt:C2-E29-009"/>
-          <p:cNvSpPr txBox="1"/>
-          <p:nvPr/>
-        </p:nvSpPr>
-        <p:spPr>
-          <a:xfrm>
-            <a:off x="7559040" y="2255520"/>
-            <a:ext cx="487680" cy="453542"/>
-          </a:xfrm>
-          <a:prstGeom prst="rect">
-            <a:avLst/>
-          </a:prstGeom>
-          <a:noFill/>
-          <a:effectLst/>
-        </p:spPr>
-        <p:txBody>
-          <a:bodyPr wrap="none" lIns="27432" rIns="27432" tIns="18288" bIns="18288" anchor="ctr">
-            <a:spAutoFit/>
-          </a:bodyPr>
-          <a:lstStyle/>
+              <a:t>Liquid heating stops at Tₛₐₜ = 302.1 K (1 bar),</a:t>
+            </a:r>
+          </a:p>
           <a:p>
             <a:pPr algn="l">
               <a:spcAft>
@@ -3421,27 +4605,59 @@
               </a:spcAft>
             </a:pPr>
             <a:r>
-              <a:rPr sz="2304" b="0" i="0">
+              <a:rPr sz="1200" b="0" i="0">
                 <a:solidFill>
                   <a:srgbClr val="E7F0F3"/>
                 </a:solidFill>
                 <a:latin typeface="Arial"/>
               </a:rPr>
-              <a:t>+</a:t>
-            </a:r>
-          </a:p>
-        </p:txBody>
-      </p:sp>
-      <p:sp>
-        <p:nvSpPr>
-          <p:cNvPr id="11" name="text10" descr="sci-ppt:C2-E29-010"/>
+              <a:t>not at T*.</a:t>
+            </a:r>
+          </a:p>
+        </p:txBody>
+      </p:sp>
+      <p:sp>
+        <p:nvSpPr>
+          <p:cNvPr id="46" name="C2-E29 ellipse 44" descr="sci-ppt:o044"/>
+          <p:cNvSpPr/>
+          <p:nvPr/>
+        </p:nvSpPr>
+        <p:spPr>
+          <a:xfrm>
+            <a:off x="7484364" y="2659380"/>
+            <a:ext cx="82296" cy="82296"/>
+          </a:xfrm>
+          <a:prstGeom prst="ellipse">
+            <a:avLst/>
+          </a:prstGeom>
+          <a:solidFill>
+            <a:srgbClr val="8EDBD4"/>
+          </a:solidFill>
+          <a:ln w="12700">
+            <a:solidFill>
+              <a:srgbClr val="8EDBD4"/>
+            </a:solidFill>
+          </a:ln>
+          <a:effectLst/>
+        </p:spPr>
+        <p:txBody>
+          <a:bodyPr rtlCol="0" anchor="ctr"/>
+          <a:lstStyle/>
+          <a:p>
+            <a:pPr algn="ctr"/>
+          </a:p>
+        </p:txBody>
+      </p:sp>
+      <p:sp>
+        <p:nvSpPr>
+          <p:cNvPr id="47" name="C2-E29 text 45" descr="sci-ppt:o045"/>
           <p:cNvSpPr txBox="1"/>
           <p:nvPr/>
         </p:nvSpPr>
         <p:spPr>
           <a:xfrm>
-            <a:off x="1219200" y="3840480"/>
-            <a:ext cx="10363200" cy="359054"/>
+            <a:off x="7653528" y="3069336"/>
+            <a:ext cx="4096512" cy="417576"/>
           </a:xfrm>
           <a:prstGeom prst="rect">
             <a:avLst/>
@@ -3450,7 +4666,7 @@
           <a:effectLst/>
         </p:spPr>
         <p:txBody>
-          <a:bodyPr wrap="none" lIns="27432" rIns="27432" tIns="18288" bIns="18288" anchor="ctr">
+          <a:bodyPr wrap="none" lIns="18288" rIns="18288" tIns="18288" bIns="18288" anchor="t">
             <a:spAutoFit/>
           </a:bodyPr>
           <a:lstStyle/>
@@ -3461,39 +4677,15 @@
               </a:spcAft>
             </a:pPr>
             <a:r>
-              <a:rPr sz="1823" b="0" i="0">
+              <a:rPr sz="1200" b="0" i="0">
                 <a:solidFill>
                   <a:srgbClr val="E7F0F3"/>
                 </a:solidFill>
                 <a:latin typeface="Arial"/>
               </a:rPr>
-              <a:t>Sum along one constant-pressure path gives Q_iso.</a:t>
-            </a:r>
-          </a:p>
-        </p:txBody>
-      </p:sp>
-      <p:sp>
-        <p:nvSpPr>
-          <p:cNvPr id="12" name="text11" descr="sci-ppt:C2-E29-011"/>
-          <p:cNvSpPr txBox="1"/>
-          <p:nvPr/>
-        </p:nvSpPr>
-        <p:spPr>
-          <a:xfrm>
-            <a:off x="365760" y="4974336"/>
-            <a:ext cx="5547360" cy="321259"/>
-          </a:xfrm>
-          <a:prstGeom prst="rect">
-            <a:avLst/>
-          </a:prstGeom>
-          <a:noFill/>
-          <a:effectLst/>
-        </p:spPr>
-        <p:txBody>
-          <a:bodyPr wrap="none" lIns="27432" rIns="27432" tIns="18288" bIns="18288" anchor="ctr">
-            <a:spAutoFit/>
-          </a:bodyPr>
-          <a:lstStyle/>
+              <a:t>Vapor heating from Tₛₐₜ to T* uses cₚ,v, a</a:t>
+            </a:r>
+          </a:p>
           <a:p>
             <a:pPr algn="l">
               <a:spcAft>
@@ -3501,27 +4693,59 @@
               </a:spcAft>
             </a:pPr>
             <a:r>
-              <a:rPr sz="1632" b="0" i="0">
+              <a:rPr sz="1200" b="0" i="0">
                 <a:solidFill>
                   <a:srgbClr val="E7F0F3"/>
                 </a:solidFill>
                 <a:latin typeface="Arial"/>
               </a:rPr>
-              <a:t>m_PFC,0: fixed compound mass</a:t>
-            </a:r>
-          </a:p>
-        </p:txBody>
-      </p:sp>
-      <p:sp>
-        <p:nvSpPr>
-          <p:cNvPr id="13" name="text12" descr="sci-ppt:C2-E29-012"/>
+              <a:t>different number.</a:t>
+            </a:r>
+          </a:p>
+        </p:txBody>
+      </p:sp>
+      <p:sp>
+        <p:nvSpPr>
+          <p:cNvPr id="48" name="C2-E29 ellipse 46" descr="sci-ppt:o046"/>
+          <p:cNvSpPr/>
+          <p:nvPr/>
+        </p:nvSpPr>
+        <p:spPr>
+          <a:xfrm>
+            <a:off x="7484364" y="3122676"/>
+            <a:ext cx="82296" cy="82296"/>
+          </a:xfrm>
+          <a:prstGeom prst="ellipse">
+            <a:avLst/>
+          </a:prstGeom>
+          <a:solidFill>
+            <a:srgbClr val="8EDBD4"/>
+          </a:solidFill>
+          <a:ln w="12700">
+            <a:solidFill>
+              <a:srgbClr val="8EDBD4"/>
+            </a:solidFill>
+          </a:ln>
+          <a:effectLst/>
+        </p:spPr>
+        <p:txBody>
+          <a:bodyPr rtlCol="0" anchor="ctr"/>
+          <a:lstStyle/>
+          <a:p>
+            <a:pPr algn="ctr"/>
+          </a:p>
+        </p:txBody>
+      </p:sp>
+      <p:sp>
+        <p:nvSpPr>
+          <p:cNvPr id="49" name="C2-E29 text 47" descr="sci-ppt:o047"/>
           <p:cNvSpPr txBox="1"/>
           <p:nvPr/>
         </p:nvSpPr>
         <p:spPr>
           <a:xfrm>
-            <a:off x="365760" y="5266944"/>
-            <a:ext cx="5547360" cy="321259"/>
+            <a:off x="7653528" y="3532631"/>
+            <a:ext cx="4096512" cy="417576"/>
           </a:xfrm>
           <a:prstGeom prst="rect">
             <a:avLst/>
@@ -3530,7 +4754,7 @@
           <a:effectLst/>
         </p:spPr>
         <p:txBody>
-          <a:bodyPr wrap="none" lIns="27432" rIns="27432" tIns="18288" bIns="18288" anchor="ctr">
+          <a:bodyPr wrap="none" lIns="18288" rIns="18288" tIns="18288" bIns="18288" anchor="t">
             <a:spAutoFit/>
           </a:bodyPr>
           <a:lstStyle/>
@@ -3541,39 +4765,15 @@
               </a:spcAft>
             </a:pPr>
             <a:r>
-              <a:rPr sz="1632" b="0" i="0">
+              <a:rPr sz="1200" b="0" i="0">
                 <a:solidFill>
                   <a:srgbClr val="E7F0F3"/>
                 </a:solidFill>
                 <a:latin typeface="Arial"/>
               </a:rPr>
-              <a:t>T₀ → T_sat: liquid heating</a:t>
-            </a:r>
-          </a:p>
-        </p:txBody>
-      </p:sp>
-      <p:sp>
-        <p:nvSpPr>
-          <p:cNvPr id="14" name="text13" descr="sci-ppt:C2-E29-013"/>
-          <p:cNvSpPr txBox="1"/>
-          <p:nvPr/>
-        </p:nvSpPr>
-        <p:spPr>
-          <a:xfrm>
-            <a:off x="365760" y="5559552"/>
-            <a:ext cx="5547360" cy="321259"/>
-          </a:xfrm>
-          <a:prstGeom prst="rect">
-            <a:avLst/>
-          </a:prstGeom>
-          <a:noFill/>
-          <a:effectLst/>
-        </p:spPr>
-        <p:txBody>
-          <a:bodyPr wrap="none" lIns="27432" rIns="27432" tIns="18288" bIns="18288" anchor="ctr">
-            <a:spAutoFit/>
-          </a:bodyPr>
-          <a:lstStyle/>
+              <a:t>The earlier estimate heated the liquid all the way</a:t>
+            </a:r>
+          </a:p>
           <a:p>
             <a:pPr algn="l">
               <a:spcAft>
@@ -3581,27 +4781,59 @@
               </a:spcAft>
             </a:pPr>
             <a:r>
-              <a:rPr sz="1632" b="0" i="0">
+              <a:rPr sz="1200" b="0" i="0">
                 <a:solidFill>
                   <a:srgbClr val="E7F0F3"/>
                 </a:solidFill>
                 <a:latin typeface="Arial"/>
               </a:rPr>
-              <a:t>T_sat → T_*: vapor heating</a:t>
-            </a:r>
-          </a:p>
-        </p:txBody>
-      </p:sp>
-      <p:sp>
-        <p:nvSpPr>
-          <p:cNvPr id="15" name="text14" descr="sci-ppt:C2-E29-014"/>
+              <a:t>to T*.</a:t>
+            </a:r>
+          </a:p>
+        </p:txBody>
+      </p:sp>
+      <p:sp>
+        <p:nvSpPr>
+          <p:cNvPr id="50" name="C2-E29 ellipse 48" descr="sci-ppt:o048"/>
+          <p:cNvSpPr/>
+          <p:nvPr/>
+        </p:nvSpPr>
+        <p:spPr>
+          <a:xfrm>
+            <a:off x="7484364" y="3585972"/>
+            <a:ext cx="82296" cy="82296"/>
+          </a:xfrm>
+          <a:prstGeom prst="ellipse">
+            <a:avLst/>
+          </a:prstGeom>
+          <a:solidFill>
+            <a:srgbClr val="8EDBD4"/>
+          </a:solidFill>
+          <a:ln w="12700">
+            <a:solidFill>
+              <a:srgbClr val="8EDBD4"/>
+            </a:solidFill>
+          </a:ln>
+          <a:effectLst/>
+        </p:spPr>
+        <p:txBody>
+          <a:bodyPr rtlCol="0" anchor="ctr"/>
+          <a:lstStyle/>
+          <a:p>
+            <a:pPr algn="ctr"/>
+          </a:p>
+        </p:txBody>
+      </p:sp>
+      <p:sp>
+        <p:nvSpPr>
+          <p:cNvPr id="51" name="C2-E29 text 49" descr="sci-ppt:o049"/>
           <p:cNvSpPr txBox="1"/>
           <p:nvPr/>
         </p:nvSpPr>
         <p:spPr>
           <a:xfrm>
-            <a:off x="365760" y="5852160"/>
-            <a:ext cx="5547360" cy="321259"/>
+            <a:off x="914400" y="5486400"/>
+            <a:ext cx="10972800" cy="231648"/>
           </a:xfrm>
           <a:prstGeom prst="rect">
             <a:avLst/>
@@ -3610,7 +4842,7 @@
           <a:effectLst/>
         </p:spPr>
         <p:txBody>
-          <a:bodyPr wrap="none" lIns="27432" rIns="27432" tIns="18288" bIns="18288" anchor="ctr">
+          <a:bodyPr wrap="none" lIns="18288" rIns="18288" tIns="18288" bIns="18288" anchor="t">
             <a:spAutoFit/>
           </a:bodyPr>
           <a:lstStyle/>
@@ -3621,27 +4853,67 @@
               </a:spcAft>
             </a:pPr>
             <a:r>
-              <a:rPr sz="1632" b="0" i="0">
+              <a:rPr sz="1200" b="0" i="0">
+                <a:solidFill>
+                  <a:srgbClr val="B4C7D2"/>
+                </a:solidFill>
+                <a:latin typeface="Arial"/>
+              </a:rPr>
+              <a:t>Per kilogram: 5.9 kJ liquid + 95 kJ latent + 18.9 kJ vapor (cₚ,v is an assumed illustration).</a:t>
+            </a:r>
+          </a:p>
+        </p:txBody>
+      </p:sp>
+      <p:sp>
+        <p:nvSpPr>
+          <p:cNvPr id="52" name="C2-E29 text 50" descr="sci-ppt:o050"/>
+          <p:cNvSpPr txBox="1"/>
+          <p:nvPr/>
+        </p:nvSpPr>
+        <p:spPr>
+          <a:xfrm>
+            <a:off x="914400" y="5897880"/>
+            <a:ext cx="10972800" cy="239395"/>
+          </a:xfrm>
+          <a:prstGeom prst="rect">
+            <a:avLst/>
+          </a:prstGeom>
+          <a:noFill/>
+          <a:effectLst/>
+        </p:spPr>
+        <p:txBody>
+          <a:bodyPr wrap="none" lIns="18288" rIns="18288" tIns="18288" bIns="18288" anchor="t">
+            <a:spAutoFit/>
+          </a:bodyPr>
+          <a:lstStyle/>
+          <a:p>
+            <a:pPr algn="l">
+              <a:spcAft>
+                <a:spcPts val="0"/>
+              </a:spcAft>
+            </a:pPr>
+            <a:r>
+              <a:rPr sz="1250" b="0" i="0">
                 <a:solidFill>
                   <a:srgbClr val="E7F0F3"/>
                 </a:solidFill>
                 <a:latin typeface="Arial"/>
               </a:rPr>
-              <a:t>L_v(T_sat,p): coexistence latent enthalpy</a:t>
-            </a:r>
-          </a:p>
-        </p:txBody>
-      </p:sp>
-      <p:sp>
-        <p:nvSpPr>
-          <p:cNvPr id="16" name="text15" descr="sci-ppt:C2-E29-015"/>
+              <a:t>Latent enthalpy still dominates, but the sensible parts must follow the phase actually being heated.</a:t>
+            </a:r>
+          </a:p>
+        </p:txBody>
+      </p:sp>
+      <p:sp>
+        <p:nvSpPr>
+          <p:cNvPr id="53" name="C2-E29 text 51" descr="sci-ppt:o051"/>
           <p:cNvSpPr txBox="1"/>
           <p:nvPr/>
         </p:nvSpPr>
         <p:spPr>
           <a:xfrm>
-            <a:off x="365760" y="6144768"/>
-            <a:ext cx="5547360" cy="321259"/>
+            <a:off x="320040" y="6510528"/>
+            <a:ext cx="11521440" cy="200660"/>
           </a:xfrm>
           <a:prstGeom prst="rect">
             <a:avLst/>
@@ -3650,7 +4922,7 @@
           <a:effectLst/>
         </p:spPr>
         <p:txBody>
-          <a:bodyPr wrap="none" lIns="27432" rIns="27432" tIns="18288" bIns="18288" anchor="ctr">
+          <a:bodyPr wrap="none" lIns="18288" rIns="18288" tIns="18288" bIns="18288" anchor="t">
             <a:spAutoFit/>
           </a:bodyPr>
           <a:lstStyle/>
@@ -3661,253 +4933,13 @@
               </a:spcAft>
             </a:pPr>
             <a:r>
-              <a:rPr sz="1632" b="0" i="0">
-                <a:solidFill>
-                  <a:srgbClr val="E7F0F3"/>
-                </a:solidFill>
-                <a:latin typeface="Arial"/>
-              </a:rPr>
-              <a:t>T, dT: temperature integration</a:t>
-            </a:r>
-          </a:p>
-        </p:txBody>
-      </p:sp>
-      <p:sp>
-        <p:nvSpPr>
-          <p:cNvPr id="17" name="text16" descr="sci-ppt:C2-E29-016"/>
-          <p:cNvSpPr txBox="1"/>
-          <p:nvPr/>
-        </p:nvSpPr>
-        <p:spPr>
-          <a:xfrm>
-            <a:off x="6156960" y="4974336"/>
-            <a:ext cx="5547360" cy="321259"/>
-          </a:xfrm>
-          <a:prstGeom prst="rect">
-            <a:avLst/>
-          </a:prstGeom>
-          <a:noFill/>
-          <a:effectLst/>
-        </p:spPr>
-        <p:txBody>
-          <a:bodyPr wrap="none" lIns="27432" rIns="27432" tIns="18288" bIns="18288" anchor="ctr">
-            <a:spAutoFit/>
-          </a:bodyPr>
-          <a:lstStyle/>
-          <a:p>
-            <a:pPr algn="l">
-              <a:spcAft>
-                <a:spcPts val="0"/>
-              </a:spcAft>
-            </a:pPr>
-            <a:r>
-              <a:rPr sz="1632" b="0" i="0">
-                <a:solidFill>
-                  <a:srgbClr val="E7F0F3"/>
-                </a:solidFill>
-                <a:latin typeface="Arial"/>
-              </a:rPr>
-              <a:t>p: constant path pressure</a:t>
-            </a:r>
-          </a:p>
-        </p:txBody>
-      </p:sp>
-      <p:sp>
-        <p:nvSpPr>
-          <p:cNvPr id="18" name="text17" descr="sci-ppt:C2-E29-017"/>
-          <p:cNvSpPr txBox="1"/>
-          <p:nvPr/>
-        </p:nvSpPr>
-        <p:spPr>
-          <a:xfrm>
-            <a:off x="6156960" y="5266944"/>
-            <a:ext cx="5547360" cy="321259"/>
-          </a:xfrm>
-          <a:prstGeom prst="rect">
-            <a:avLst/>
-          </a:prstGeom>
-          <a:noFill/>
-          <a:effectLst/>
-        </p:spPr>
-        <p:txBody>
-          <a:bodyPr wrap="none" lIns="27432" rIns="27432" tIns="18288" bIns="18288" anchor="ctr">
-            <a:spAutoFit/>
-          </a:bodyPr>
-          <a:lstStyle/>
-          <a:p>
-            <a:pPr algn="l">
-              <a:spcAft>
-                <a:spcPts val="0"/>
-              </a:spcAft>
-            </a:pPr>
-            <a:r>
-              <a:rPr sz="1632" b="0" i="0">
-                <a:solidFill>
-                  <a:srgbClr val="E7F0F3"/>
-                </a:solidFill>
-                <a:latin typeface="Arial"/>
-              </a:rPr>
-              <a:t>T_sat: phase transition</a:t>
-            </a:r>
-          </a:p>
-        </p:txBody>
-      </p:sp>
-      <p:sp>
-        <p:nvSpPr>
-          <p:cNvPr id="19" name="text18" descr="sci-ppt:C2-E29-018"/>
-          <p:cNvSpPr txBox="1"/>
-          <p:nvPr/>
-        </p:nvSpPr>
-        <p:spPr>
-          <a:xfrm>
-            <a:off x="6156960" y="5559552"/>
-            <a:ext cx="5547360" cy="321259"/>
-          </a:xfrm>
-          <a:prstGeom prst="rect">
-            <a:avLst/>
-          </a:prstGeom>
-          <a:noFill/>
-          <a:effectLst/>
-        </p:spPr>
-        <p:txBody>
-          <a:bodyPr wrap="none" lIns="27432" rIns="27432" tIns="18288" bIns="18288" anchor="ctr">
-            <a:spAutoFit/>
-          </a:bodyPr>
-          <a:lstStyle/>
-          <a:p>
-            <a:pPr algn="l">
-              <a:spcAft>
-                <a:spcPts val="0"/>
-              </a:spcAft>
-            </a:pPr>
-            <a:r>
-              <a:rPr sz="1632" b="0" i="0">
-                <a:solidFill>
-                  <a:srgbClr val="E7F0F3"/>
-                </a:solidFill>
-                <a:latin typeface="Arial"/>
-              </a:rPr>
-              <a:t>c_p,l, c_p,v: phase heat capacities</a:t>
-            </a:r>
-          </a:p>
-        </p:txBody>
-      </p:sp>
-      <p:sp>
-        <p:nvSpPr>
-          <p:cNvPr id="20" name="text19" descr="sci-ppt:C2-E29-019"/>
-          <p:cNvSpPr txBox="1"/>
-          <p:nvPr/>
-        </p:nvSpPr>
-        <p:spPr>
-          <a:xfrm>
-            <a:off x="6156960" y="5852160"/>
-            <a:ext cx="5547360" cy="321259"/>
-          </a:xfrm>
-          <a:prstGeom prst="rect">
-            <a:avLst/>
-          </a:prstGeom>
-          <a:noFill/>
-          <a:effectLst/>
-        </p:spPr>
-        <p:txBody>
-          <a:bodyPr wrap="none" lIns="27432" rIns="27432" tIns="18288" bIns="18288" anchor="ctr">
-            <a:spAutoFit/>
-          </a:bodyPr>
-          <a:lstStyle/>
-          <a:p>
-            <a:pPr algn="l">
-              <a:spcAft>
-                <a:spcPts val="0"/>
-              </a:spcAft>
-            </a:pPr>
-            <a:r>
-              <a:rPr sz="1632" b="0" i="0">
-                <a:solidFill>
-                  <a:srgbClr val="E7F0F3"/>
-                </a:solidFill>
-                <a:latin typeface="Arial"/>
-              </a:rPr>
-              <a:t>Q_iso: total path heat</a:t>
-            </a:r>
-          </a:p>
-        </p:txBody>
-      </p:sp>
-      <p:sp>
-        <p:nvSpPr>
-          <p:cNvPr id="21" name="text20" descr="sci-ppt:C2-E29-020"/>
-          <p:cNvSpPr txBox="1"/>
-          <p:nvPr/>
-        </p:nvSpPr>
-        <p:spPr>
-          <a:xfrm>
-            <a:off x="365760" y="6632448"/>
-            <a:ext cx="11277600" cy="302361"/>
-          </a:xfrm>
-          <a:prstGeom prst="rect">
-            <a:avLst/>
-          </a:prstGeom>
-          <a:noFill/>
-          <a:effectLst/>
-        </p:spPr>
-        <p:txBody>
-          <a:bodyPr wrap="none" lIns="27432" rIns="27432" tIns="18288" bIns="18288" anchor="ctr">
-            <a:spAutoFit/>
-          </a:bodyPr>
-          <a:lstStyle/>
-          <a:p>
-            <a:pPr algn="l">
-              <a:spcAft>
-                <a:spcPts val="0"/>
-              </a:spcAft>
-            </a:pPr>
-            <a:r>
-              <a:rPr sz="1536" b="0" i="0">
+              <a:rPr sz="1000" b="0" i="0">
                 <a:solidFill>
                   <a:srgbClr val="B4C7D2"/>
                 </a:solidFill>
                 <a:latin typeface="Arial"/>
               </a:rPr>
-              <a:t>Latent enthalpy already contains the phase-transition flow work</a:t>
-            </a:r>
-          </a:p>
-        </p:txBody>
-      </p:sp>
-      <p:sp>
-        <p:nvSpPr>
-          <p:cNvPr id="22" name="text21" descr="sci-ppt:C2-E29-021"/>
-          <p:cNvSpPr txBox="1"/>
-          <p:nvPr/>
-        </p:nvSpPr>
-        <p:spPr>
-          <a:xfrm>
-            <a:off x="365760" y="6925056"/>
-            <a:ext cx="11277600" cy="302361"/>
-          </a:xfrm>
-          <a:prstGeom prst="rect">
-            <a:avLst/>
-          </a:prstGeom>
-          <a:noFill/>
-          <a:effectLst/>
-        </p:spPr>
-        <p:txBody>
-          <a:bodyPr wrap="none" lIns="27432" rIns="27432" tIns="18288" bIns="18288" anchor="ctr">
-            <a:spAutoFit/>
-          </a:bodyPr>
-          <a:lstStyle/>
-          <a:p>
-            <a:pPr algn="l">
-              <a:spcAft>
-                <a:spcPts val="0"/>
-              </a:spcAft>
-            </a:pPr>
-            <a:r>
-              <a:rPr sz="1536" b="0" i="0">
-                <a:solidFill>
-                  <a:srgbClr val="B4C7D2"/>
-                </a:solidFill>
-                <a:latin typeface="Arial"/>
-              </a:rPr>
-              <a:t>The constant-property screen does not replace a calibrated enthalpy path</a:t>
+              <a:t>Refined constant-pressure path of Eq. C2-E29; Tₛₐₜ from Eq. C2-E12 at 1 bar.</a:t>
             </a:r>
           </a:p>
         </p:txBody>
